--- a/src/ppt-super/assets/tpl-19-topic-table/template.pptx
+++ b/src/ppt-super/assets/tpl-19-topic-table/template.pptx
@@ -3136,7 +3136,14 @@
           <a:bodyPr rtlCol="0" anchor="ctr"/>
           <a:lstStyle/>
           <a:p>
-            <a:pPr algn="ctr"/>
+            <a:pPr algn="ctr">
+              <a:spcBef>
+                <a:spcPts val="0"/>
+              </a:spcBef>
+              <a:spcAft>
+                <a:spcPts val="0"/>
+              </a:spcAft>
+            </a:pPr>
           </a:p>
         </p:txBody>
       </p:sp>
@@ -3166,14 +3173,21 @@
               <a:lnSpc>
                 <a:spcPct val="112000"/>
               </a:lnSpc>
+              <a:spcBef>
+                <a:spcPts val="0"/>
+              </a:spcBef>
+              <a:spcAft>
+                <a:spcPts val="0"/>
+              </a:spcAft>
             </a:pPr>
             <a:r>
-              <a:rPr sz="1400" b="1" i="0">
+              <a:rPr sz="1400" b="1" i="0" lang="zh-CN" altLang="zh-CN">
                 <a:solidFill>
                   <a:srgbClr val="FFFFFF"/>
                 </a:solidFill>
                 <a:latin typeface="Microsoft YaHei"/>
                 <a:ea typeface="Microsoft YaHei"/>
+                <a:cs typeface="Microsoft YaHei"/>
               </a:rPr>
               <a:t>月度例会</a:t>
             </a:r>
@@ -3206,14 +3220,21 @@
               <a:lnSpc>
                 <a:spcPct val="112000"/>
               </a:lnSpc>
+              <a:spcBef>
+                <a:spcPts val="0"/>
+              </a:spcBef>
+              <a:spcAft>
+                <a:spcPts val="0"/>
+              </a:spcAft>
             </a:pPr>
             <a:r>
-              <a:rPr sz="2200" b="1" i="0">
+              <a:rPr sz="2200" b="1" i="0" lang="zh-CN" altLang="zh-CN">
                 <a:solidFill>
                   <a:srgbClr val="B90A0A"/>
                 </a:solidFill>
                 <a:latin typeface="Microsoft YaHei"/>
                 <a:ea typeface="Microsoft YaHei"/>
+                <a:cs typeface="Microsoft YaHei"/>
               </a:rPr>
               <a:t>五大议题四项按期推进, 数据合规风险需本周闭环</a:t>
             </a:r>
@@ -3300,7 +3321,14 @@
           <a:bodyPr rtlCol="0" anchor="ctr"/>
           <a:lstStyle/>
           <a:p>
-            <a:pPr algn="ctr"/>
+            <a:pPr algn="ctr">
+              <a:spcBef>
+                <a:spcPts val="0"/>
+              </a:spcBef>
+              <a:spcAft>
+                <a:spcPts val="0"/>
+              </a:spcAft>
+            </a:pPr>
           </a:p>
         </p:txBody>
       </p:sp>
@@ -3330,14 +3358,21 @@
               <a:lnSpc>
                 <a:spcPct val="112000"/>
               </a:lnSpc>
+              <a:spcBef>
+                <a:spcPts val="0"/>
+              </a:spcBef>
+              <a:spcAft>
+                <a:spcPts val="0"/>
+              </a:spcAft>
             </a:pPr>
             <a:r>
-              <a:rPr sz="950" b="0" i="0">
+              <a:rPr sz="950" b="0" i="0" lang="zh-CN" altLang="zh-CN">
                 <a:solidFill>
                   <a:srgbClr val="595959"/>
                 </a:solidFill>
                 <a:latin typeface="Microsoft YaHei"/>
                 <a:ea typeface="Microsoft YaHei"/>
+                <a:cs typeface="Microsoft YaHei"/>
               </a:rPr>
               <a:t>红框 = 高风险/重点关注议题</a:t>
             </a:r>
@@ -3386,7 +3421,14 @@
           <a:bodyPr rtlCol="0" anchor="ctr"/>
           <a:lstStyle/>
           <a:p>
-            <a:pPr algn="ctr"/>
+            <a:pPr algn="ctr">
+              <a:spcBef>
+                <a:spcPts val="0"/>
+              </a:spcBef>
+              <a:spcAft>
+                <a:spcPts val="0"/>
+              </a:spcAft>
+            </a:pPr>
           </a:p>
         </p:txBody>
       </p:sp>
@@ -3416,14 +3458,21 @@
               <a:lnSpc>
                 <a:spcPct val="112000"/>
               </a:lnSpc>
+              <a:spcBef>
+                <a:spcPts val="0"/>
+              </a:spcBef>
+              <a:spcAft>
+                <a:spcPts val="0"/>
+              </a:spcAft>
             </a:pPr>
             <a:r>
-              <a:rPr sz="1300" b="1" i="0">
+              <a:rPr sz="1300" b="1" i="0" lang="zh-CN" altLang="zh-CN">
                 <a:solidFill>
                   <a:srgbClr val="FFFFFF"/>
                 </a:solidFill>
                 <a:latin typeface="Microsoft YaHei"/>
                 <a:ea typeface="Microsoft YaHei"/>
+                <a:cs typeface="Microsoft YaHei"/>
               </a:rPr>
               <a:t>议题</a:t>
             </a:r>
@@ -3472,7 +3521,14 @@
           <a:bodyPr rtlCol="0" anchor="ctr"/>
           <a:lstStyle/>
           <a:p>
-            <a:pPr algn="ctr"/>
+            <a:pPr algn="ctr">
+              <a:spcBef>
+                <a:spcPts val="0"/>
+              </a:spcBef>
+              <a:spcAft>
+                <a:spcPts val="0"/>
+              </a:spcAft>
+            </a:pPr>
           </a:p>
         </p:txBody>
       </p:sp>
@@ -3502,14 +3558,21 @@
               <a:lnSpc>
                 <a:spcPct val="112000"/>
               </a:lnSpc>
+              <a:spcBef>
+                <a:spcPts val="0"/>
+              </a:spcBef>
+              <a:spcAft>
+                <a:spcPts val="0"/>
+              </a:spcAft>
             </a:pPr>
             <a:r>
-              <a:rPr sz="1300" b="1" i="0">
+              <a:rPr sz="1300" b="1" i="0" lang="zh-CN" altLang="zh-CN">
                 <a:solidFill>
                   <a:srgbClr val="FFFFFF"/>
                 </a:solidFill>
                 <a:latin typeface="Microsoft YaHei"/>
                 <a:ea typeface="Microsoft YaHei"/>
+                <a:cs typeface="Microsoft YaHei"/>
               </a:rPr>
               <a:t>关键结论</a:t>
             </a:r>
@@ -3558,7 +3621,14 @@
           <a:bodyPr rtlCol="0" anchor="ctr"/>
           <a:lstStyle/>
           <a:p>
-            <a:pPr algn="ctr"/>
+            <a:pPr algn="ctr">
+              <a:spcBef>
+                <a:spcPts val="0"/>
+              </a:spcBef>
+              <a:spcAft>
+                <a:spcPts val="0"/>
+              </a:spcAft>
+            </a:pPr>
           </a:p>
         </p:txBody>
       </p:sp>
@@ -3588,14 +3658,21 @@
               <a:lnSpc>
                 <a:spcPct val="112000"/>
               </a:lnSpc>
+              <a:spcBef>
+                <a:spcPts val="0"/>
+              </a:spcBef>
+              <a:spcAft>
+                <a:spcPts val="0"/>
+              </a:spcAft>
             </a:pPr>
             <a:r>
-              <a:rPr sz="1300" b="1" i="0">
+              <a:rPr sz="1300" b="1" i="0" lang="zh-CN" altLang="zh-CN">
                 <a:solidFill>
                   <a:srgbClr val="FFFFFF"/>
                 </a:solidFill>
                 <a:latin typeface="Microsoft YaHei"/>
                 <a:ea typeface="Microsoft YaHei"/>
+                <a:cs typeface="Microsoft YaHei"/>
               </a:rPr>
               <a:t>责任人</a:t>
             </a:r>
@@ -3644,7 +3721,14 @@
           <a:bodyPr rtlCol="0" anchor="ctr"/>
           <a:lstStyle/>
           <a:p>
-            <a:pPr algn="ctr"/>
+            <a:pPr algn="ctr">
+              <a:spcBef>
+                <a:spcPts val="0"/>
+              </a:spcBef>
+              <a:spcAft>
+                <a:spcPts val="0"/>
+              </a:spcAft>
+            </a:pPr>
           </a:p>
         </p:txBody>
       </p:sp>
@@ -3674,14 +3758,21 @@
               <a:lnSpc>
                 <a:spcPct val="112000"/>
               </a:lnSpc>
+              <a:spcBef>
+                <a:spcPts val="0"/>
+              </a:spcBef>
+              <a:spcAft>
+                <a:spcPts val="0"/>
+              </a:spcAft>
             </a:pPr>
             <a:r>
-              <a:rPr sz="1300" b="1" i="0">
+              <a:rPr sz="1300" b="1" i="0" lang="zh-CN" altLang="zh-CN">
                 <a:solidFill>
                   <a:srgbClr val="FFFFFF"/>
                 </a:solidFill>
                 <a:latin typeface="Microsoft YaHei"/>
                 <a:ea typeface="Microsoft YaHei"/>
+                <a:cs typeface="Microsoft YaHei"/>
               </a:rPr>
               <a:t>时间</a:t>
             </a:r>
@@ -3730,7 +3821,14 @@
           <a:bodyPr rtlCol="0" anchor="ctr"/>
           <a:lstStyle/>
           <a:p>
-            <a:pPr algn="ctr"/>
+            <a:pPr algn="ctr">
+              <a:spcBef>
+                <a:spcPts val="0"/>
+              </a:spcBef>
+              <a:spcAft>
+                <a:spcPts val="0"/>
+              </a:spcAft>
+            </a:pPr>
           </a:p>
         </p:txBody>
       </p:sp>
@@ -3776,7 +3874,14 @@
           <a:bodyPr rtlCol="0" anchor="ctr"/>
           <a:lstStyle/>
           <a:p>
-            <a:pPr algn="ctr"/>
+            <a:pPr algn="ctr">
+              <a:spcBef>
+                <a:spcPts val="0"/>
+              </a:spcBef>
+              <a:spcAft>
+                <a:spcPts val="0"/>
+              </a:spcAft>
+            </a:pPr>
           </a:p>
         </p:txBody>
       </p:sp>
@@ -3822,7 +3927,14 @@
           <a:bodyPr rtlCol="0" anchor="ctr"/>
           <a:lstStyle/>
           <a:p>
-            <a:pPr algn="ctr"/>
+            <a:pPr algn="ctr">
+              <a:spcBef>
+                <a:spcPts val="0"/>
+              </a:spcBef>
+              <a:spcAft>
+                <a:spcPts val="0"/>
+              </a:spcAft>
+            </a:pPr>
           </a:p>
         </p:txBody>
       </p:sp>
@@ -3868,7 +3980,14 @@
           <a:bodyPr rtlCol="0" anchor="ctr"/>
           <a:lstStyle/>
           <a:p>
-            <a:pPr algn="ctr"/>
+            <a:pPr algn="ctr">
+              <a:spcBef>
+                <a:spcPts val="0"/>
+              </a:spcBef>
+              <a:spcAft>
+                <a:spcPts val="0"/>
+              </a:spcAft>
+            </a:pPr>
           </a:p>
         </p:txBody>
       </p:sp>
@@ -3896,16 +4015,23 @@
           <a:p>
             <a:pPr algn="l">
               <a:lnSpc>
-                <a:spcPct val="112000"/>
+                <a:spcPct val="96000"/>
               </a:lnSpc>
+              <a:spcBef>
+                <a:spcPts val="0"/>
+              </a:spcBef>
+              <a:spcAft>
+                <a:spcPts val="0"/>
+              </a:spcAft>
             </a:pPr>
             <a:r>
-              <a:rPr sz="1200" b="1" i="0">
+              <a:rPr sz="1120" b="1" i="0" lang="zh-CN" altLang="zh-CN">
                 <a:solidFill>
                   <a:srgbClr val="1F4E79"/>
                 </a:solidFill>
                 <a:latin typeface="Microsoft YaHei"/>
                 <a:ea typeface="Microsoft YaHei"/>
+                <a:cs typeface="Microsoft YaHei"/>
               </a:rPr>
               <a:t>昇腾集群扩容</a:t>
             </a:r>
@@ -3938,14 +4064,21 @@
               <a:lnSpc>
                 <a:spcPct val="112000"/>
               </a:lnSpc>
+              <a:spcBef>
+                <a:spcPts val="0"/>
+              </a:spcBef>
+              <a:spcAft>
+                <a:spcPts val="0"/>
+              </a:spcAft>
             </a:pPr>
             <a:r>
-              <a:rPr sz="1100" b="0" i="0">
+              <a:rPr sz="1100" b="0" i="0" lang="zh-CN" altLang="zh-CN">
                 <a:solidFill>
                   <a:srgbClr val="262626"/>
                 </a:solidFill>
                 <a:latin typeface="Microsoft YaHei"/>
                 <a:ea typeface="Microsoft YaHei"/>
+                <a:cs typeface="Microsoft YaHei"/>
               </a:rPr>
               <a:t>二期 4000 卡集群完成机房勘测与供电评估, 设备到货率 85%, 液冷改造与组网方案均已冻结, 整体进度符合计划, 无需升级支持</a:t>
             </a:r>
@@ -3978,14 +4111,21 @@
               <a:lnSpc>
                 <a:spcPct val="112000"/>
               </a:lnSpc>
+              <a:spcBef>
+                <a:spcPts val="0"/>
+              </a:spcBef>
+              <a:spcAft>
+                <a:spcPts val="0"/>
+              </a:spcAft>
             </a:pPr>
             <a:r>
-              <a:rPr sz="1100" b="0" i="0">
+              <a:rPr sz="1100" b="0" i="0" lang="zh-CN" altLang="zh-CN">
                 <a:solidFill>
                   <a:srgbClr val="595959"/>
                 </a:solidFill>
                 <a:latin typeface="Microsoft YaHei"/>
                 <a:ea typeface="Microsoft YaHei"/>
+                <a:cs typeface="Microsoft YaHei"/>
               </a:rPr>
               <a:t>算力平台部/张伟</a:t>
             </a:r>
@@ -4018,14 +4158,21 @@
               <a:lnSpc>
                 <a:spcPct val="112000"/>
               </a:lnSpc>
+              <a:spcBef>
+                <a:spcPts val="0"/>
+              </a:spcBef>
+              <a:spcAft>
+                <a:spcPts val="0"/>
+              </a:spcAft>
             </a:pPr>
             <a:r>
-              <a:rPr sz="1100" b="1" i="0">
+              <a:rPr sz="1100" b="1" i="0" lang="zh-CN" altLang="zh-CN">
                 <a:solidFill>
                   <a:srgbClr val="262626"/>
                 </a:solidFill>
                 <a:latin typeface="Microsoft YaHei"/>
                 <a:ea typeface="Microsoft YaHei"/>
+                <a:cs typeface="Microsoft YaHei"/>
               </a:rPr>
               <a:t>6/30 已完成</a:t>
             </a:r>
@@ -4074,7 +4221,14 @@
           <a:bodyPr rtlCol="0" anchor="ctr"/>
           <a:lstStyle/>
           <a:p>
-            <a:pPr algn="ctr"/>
+            <a:pPr algn="ctr">
+              <a:spcBef>
+                <a:spcPts val="0"/>
+              </a:spcBef>
+              <a:spcAft>
+                <a:spcPts val="0"/>
+              </a:spcAft>
+            </a:pPr>
           </a:p>
         </p:txBody>
       </p:sp>
@@ -4120,7 +4274,14 @@
           <a:bodyPr rtlCol="0" anchor="ctr"/>
           <a:lstStyle/>
           <a:p>
-            <a:pPr algn="ctr"/>
+            <a:pPr algn="ctr">
+              <a:spcBef>
+                <a:spcPts val="0"/>
+              </a:spcBef>
+              <a:spcAft>
+                <a:spcPts val="0"/>
+              </a:spcAft>
+            </a:pPr>
           </a:p>
         </p:txBody>
       </p:sp>
@@ -4166,7 +4327,14 @@
           <a:bodyPr rtlCol="0" anchor="ctr"/>
           <a:lstStyle/>
           <a:p>
-            <a:pPr algn="ctr"/>
+            <a:pPr algn="ctr">
+              <a:spcBef>
+                <a:spcPts val="0"/>
+              </a:spcBef>
+              <a:spcAft>
+                <a:spcPts val="0"/>
+              </a:spcAft>
+            </a:pPr>
           </a:p>
         </p:txBody>
       </p:sp>
@@ -4212,7 +4380,14 @@
           <a:bodyPr rtlCol="0" anchor="ctr"/>
           <a:lstStyle/>
           <a:p>
-            <a:pPr algn="ctr"/>
+            <a:pPr algn="ctr">
+              <a:spcBef>
+                <a:spcPts val="0"/>
+              </a:spcBef>
+              <a:spcAft>
+                <a:spcPts val="0"/>
+              </a:spcAft>
+            </a:pPr>
           </a:p>
         </p:txBody>
       </p:sp>
@@ -4240,16 +4415,23 @@
           <a:p>
             <a:pPr algn="l">
               <a:lnSpc>
-                <a:spcPct val="112000"/>
+                <a:spcPct val="96000"/>
               </a:lnSpc>
+              <a:spcBef>
+                <a:spcPts val="0"/>
+              </a:spcBef>
+              <a:spcAft>
+                <a:spcPts val="0"/>
+              </a:spcAft>
             </a:pPr>
             <a:r>
-              <a:rPr sz="1200" b="1" i="0">
+              <a:rPr sz="1120" b="1" i="0" lang="zh-CN" altLang="zh-CN">
                 <a:solidFill>
                   <a:srgbClr val="1F4E79"/>
                 </a:solidFill>
                 <a:latin typeface="Microsoft YaHei"/>
                 <a:ea typeface="Microsoft YaHei"/>
+                <a:cs typeface="Microsoft YaHei"/>
               </a:rPr>
               <a:t>跨境数据合规</a:t>
             </a:r>
@@ -4282,14 +4464,21 @@
               <a:lnSpc>
                 <a:spcPct val="112000"/>
               </a:lnSpc>
+              <a:spcBef>
+                <a:spcPts val="0"/>
+              </a:spcBef>
+              <a:spcAft>
+                <a:spcPts val="0"/>
+              </a:spcAft>
             </a:pPr>
             <a:r>
-              <a:rPr sz="1100" b="0" i="0">
+              <a:rPr sz="1100" b="0" i="0" lang="zh-CN" altLang="zh-CN">
                 <a:solidFill>
                   <a:srgbClr val="262626"/>
                 </a:solidFill>
                 <a:latin typeface="Microsoft YaHei"/>
                 <a:ea typeface="Microsoft YaHei"/>
+                <a:cs typeface="Microsoft YaHei"/>
               </a:rPr>
               <a:t>数据出境清单梳理滞后 2 周, 存在 7 月外部审计不通过风险, 需追加 3 名治理人力并于本周完成清单闭环, 已升级部门例会跟踪</a:t>
             </a:r>
@@ -4322,14 +4511,21 @@
               <a:lnSpc>
                 <a:spcPct val="112000"/>
               </a:lnSpc>
+              <a:spcBef>
+                <a:spcPts val="0"/>
+              </a:spcBef>
+              <a:spcAft>
+                <a:spcPts val="0"/>
+              </a:spcAft>
             </a:pPr>
             <a:r>
-              <a:rPr sz="1100" b="0" i="0">
+              <a:rPr sz="1100" b="0" i="0" lang="zh-CN" altLang="zh-CN">
                 <a:solidFill>
                   <a:srgbClr val="595959"/>
                 </a:solidFill>
                 <a:latin typeface="Microsoft YaHei"/>
                 <a:ea typeface="Microsoft YaHei"/>
+                <a:cs typeface="Microsoft YaHei"/>
               </a:rPr>
               <a:t>数据治理部/李娜</a:t>
             </a:r>
@@ -4362,14 +4558,21 @@
               <a:lnSpc>
                 <a:spcPct val="112000"/>
               </a:lnSpc>
+              <a:spcBef>
+                <a:spcPts val="0"/>
+              </a:spcBef>
+              <a:spcAft>
+                <a:spcPts val="0"/>
+              </a:spcAft>
             </a:pPr>
             <a:r>
-              <a:rPr sz="1100" b="1" i="0">
+              <a:rPr sz="1100" b="1" i="0" lang="zh-CN" altLang="zh-CN">
                 <a:solidFill>
                   <a:srgbClr val="262626"/>
                 </a:solidFill>
                 <a:latin typeface="Microsoft YaHei"/>
                 <a:ea typeface="Microsoft YaHei"/>
+                <a:cs typeface="Microsoft YaHei"/>
               </a:rPr>
               <a:t>7/5 风险项</a:t>
             </a:r>
@@ -4418,7 +4621,14 @@
           <a:bodyPr rtlCol="0" anchor="ctr"/>
           <a:lstStyle/>
           <a:p>
-            <a:pPr algn="ctr"/>
+            <a:pPr algn="ctr">
+              <a:spcBef>
+                <a:spcPts val="0"/>
+              </a:spcBef>
+              <a:spcAft>
+                <a:spcPts val="0"/>
+              </a:spcAft>
+            </a:pPr>
           </a:p>
         </p:txBody>
       </p:sp>
@@ -4464,7 +4674,14 @@
           <a:bodyPr rtlCol="0" anchor="ctr"/>
           <a:lstStyle/>
           <a:p>
-            <a:pPr algn="ctr"/>
+            <a:pPr algn="ctr">
+              <a:spcBef>
+                <a:spcPts val="0"/>
+              </a:spcBef>
+              <a:spcAft>
+                <a:spcPts val="0"/>
+              </a:spcAft>
+            </a:pPr>
           </a:p>
         </p:txBody>
       </p:sp>
@@ -4510,7 +4727,14 @@
           <a:bodyPr rtlCol="0" anchor="ctr"/>
           <a:lstStyle/>
           <a:p>
-            <a:pPr algn="ctr"/>
+            <a:pPr algn="ctr">
+              <a:spcBef>
+                <a:spcPts val="0"/>
+              </a:spcBef>
+              <a:spcAft>
+                <a:spcPts val="0"/>
+              </a:spcAft>
+            </a:pPr>
           </a:p>
         </p:txBody>
       </p:sp>
@@ -4556,7 +4780,14 @@
           <a:bodyPr rtlCol="0" anchor="ctr"/>
           <a:lstStyle/>
           <a:p>
-            <a:pPr algn="ctr"/>
+            <a:pPr algn="ctr">
+              <a:spcBef>
+                <a:spcPts val="0"/>
+              </a:spcBef>
+              <a:spcAft>
+                <a:spcPts val="0"/>
+              </a:spcAft>
+            </a:pPr>
           </a:p>
         </p:txBody>
       </p:sp>
@@ -4584,16 +4815,23 @@
           <a:p>
             <a:pPr algn="l">
               <a:lnSpc>
-                <a:spcPct val="112000"/>
+                <a:spcPct val="96000"/>
               </a:lnSpc>
+              <a:spcBef>
+                <a:spcPts val="0"/>
+              </a:spcBef>
+              <a:spcAft>
+                <a:spcPts val="0"/>
+              </a:spcAft>
             </a:pPr>
             <a:r>
-              <a:rPr sz="1200" b="1" i="0">
+              <a:rPr sz="1120" b="1" i="0" lang="zh-CN" altLang="zh-CN">
                 <a:solidFill>
                   <a:srgbClr val="1F4E79"/>
                 </a:solidFill>
                 <a:latin typeface="Microsoft YaHei"/>
                 <a:ea typeface="Microsoft YaHei"/>
+                <a:cs typeface="Microsoft YaHei"/>
               </a:rPr>
               <a:t>5G-A 园区试点</a:t>
             </a:r>
@@ -4626,14 +4864,21 @@
               <a:lnSpc>
                 <a:spcPct val="112000"/>
               </a:lnSpc>
+              <a:spcBef>
+                <a:spcPts val="0"/>
+              </a:spcBef>
+              <a:spcAft>
+                <a:spcPts val="0"/>
+              </a:spcAft>
             </a:pPr>
             <a:r>
-              <a:rPr sz="1100" b="0" i="0">
+              <a:rPr sz="1100" b="0" i="0" lang="zh-CN" altLang="zh-CN">
                 <a:solidFill>
                   <a:srgbClr val="262626"/>
                 </a:solidFill>
                 <a:latin typeface="Microsoft YaHei"/>
                 <a:ea typeface="Microsoft YaHei"/>
+                <a:cs typeface="Microsoft YaHei"/>
               </a:rPr>
               <a:t>首批 3 个园区完成通感一体部署, 时延实测 4ms 优于目标 20%, 单园区改造成本低于预算 12%, 可启动规模复制</a:t>
             </a:r>
@@ -4666,14 +4911,21 @@
               <a:lnSpc>
                 <a:spcPct val="112000"/>
               </a:lnSpc>
+              <a:spcBef>
+                <a:spcPts val="0"/>
+              </a:spcBef>
+              <a:spcAft>
+                <a:spcPts val="0"/>
+              </a:spcAft>
             </a:pPr>
             <a:r>
-              <a:rPr sz="1100" b="0" i="0">
+              <a:rPr sz="1100" b="0" i="0" lang="zh-CN" altLang="zh-CN">
                 <a:solidFill>
                   <a:srgbClr val="595959"/>
                 </a:solidFill>
                 <a:latin typeface="Microsoft YaHei"/>
                 <a:ea typeface="Microsoft YaHei"/>
+                <a:cs typeface="Microsoft YaHei"/>
               </a:rPr>
               <a:t>无线产品线/王强</a:t>
             </a:r>
@@ -4706,14 +4958,21 @@
               <a:lnSpc>
                 <a:spcPct val="112000"/>
               </a:lnSpc>
+              <a:spcBef>
+                <a:spcPts val="0"/>
+              </a:spcBef>
+              <a:spcAft>
+                <a:spcPts val="0"/>
+              </a:spcAft>
             </a:pPr>
             <a:r>
-              <a:rPr sz="1100" b="1" i="0">
+              <a:rPr sz="1100" b="1" i="0" lang="zh-CN" altLang="zh-CN">
                 <a:solidFill>
                   <a:srgbClr val="262626"/>
                 </a:solidFill>
                 <a:latin typeface="Microsoft YaHei"/>
                 <a:ea typeface="Microsoft YaHei"/>
+                <a:cs typeface="Microsoft YaHei"/>
               </a:rPr>
               <a:t>7/15 启动复制</a:t>
             </a:r>
@@ -4762,7 +5021,14 @@
           <a:bodyPr rtlCol="0" anchor="ctr"/>
           <a:lstStyle/>
           <a:p>
-            <a:pPr algn="ctr"/>
+            <a:pPr algn="ctr">
+              <a:spcBef>
+                <a:spcPts val="0"/>
+              </a:spcBef>
+              <a:spcAft>
+                <a:spcPts val="0"/>
+              </a:spcAft>
+            </a:pPr>
           </a:p>
         </p:txBody>
       </p:sp>
@@ -4808,7 +5074,14 @@
           <a:bodyPr rtlCol="0" anchor="ctr"/>
           <a:lstStyle/>
           <a:p>
-            <a:pPr algn="ctr"/>
+            <a:pPr algn="ctr">
+              <a:spcBef>
+                <a:spcPts val="0"/>
+              </a:spcBef>
+              <a:spcAft>
+                <a:spcPts val="0"/>
+              </a:spcAft>
+            </a:pPr>
           </a:p>
         </p:txBody>
       </p:sp>
@@ -4854,7 +5127,14 @@
           <a:bodyPr rtlCol="0" anchor="ctr"/>
           <a:lstStyle/>
           <a:p>
-            <a:pPr algn="ctr"/>
+            <a:pPr algn="ctr">
+              <a:spcBef>
+                <a:spcPts val="0"/>
+              </a:spcBef>
+              <a:spcAft>
+                <a:spcPts val="0"/>
+              </a:spcAft>
+            </a:pPr>
           </a:p>
         </p:txBody>
       </p:sp>
@@ -4900,7 +5180,14 @@
           <a:bodyPr rtlCol="0" anchor="ctr"/>
           <a:lstStyle/>
           <a:p>
-            <a:pPr algn="ctr"/>
+            <a:pPr algn="ctr">
+              <a:spcBef>
+                <a:spcPts val="0"/>
+              </a:spcBef>
+              <a:spcAft>
+                <a:spcPts val="0"/>
+              </a:spcAft>
+            </a:pPr>
           </a:p>
         </p:txBody>
       </p:sp>
@@ -4928,16 +5215,23 @@
           <a:p>
             <a:pPr algn="l">
               <a:lnSpc>
-                <a:spcPct val="112000"/>
+                <a:spcPct val="96000"/>
               </a:lnSpc>
+              <a:spcBef>
+                <a:spcPts val="0"/>
+              </a:spcBef>
+              <a:spcAft>
+                <a:spcPts val="0"/>
+              </a:spcAft>
             </a:pPr>
             <a:r>
-              <a:rPr sz="1200" b="1" i="0">
+              <a:rPr sz="1120" b="1" i="0" lang="zh-CN" altLang="zh-CN">
                 <a:solidFill>
                   <a:srgbClr val="1F4E79"/>
                 </a:solidFill>
                 <a:latin typeface="Microsoft YaHei"/>
                 <a:ea typeface="Microsoft YaHei"/>
+                <a:cs typeface="Microsoft YaHei"/>
               </a:rPr>
               <a:t>智能体平台上线</a:t>
             </a:r>
@@ -4970,14 +5264,21 @@
               <a:lnSpc>
                 <a:spcPct val="112000"/>
               </a:lnSpc>
+              <a:spcBef>
+                <a:spcPts val="0"/>
+              </a:spcBef>
+              <a:spcAft>
+                <a:spcPts val="0"/>
+              </a:spcAft>
             </a:pPr>
             <a:r>
-              <a:rPr sz="1100" b="0" i="0">
+              <a:rPr sz="1100" b="0" i="0" lang="zh-CN" altLang="zh-CN">
                 <a:solidFill>
                   <a:srgbClr val="262626"/>
                 </a:solidFill>
                 <a:latin typeface="Microsoft YaHei"/>
                 <a:ea typeface="Microsoft YaHei"/>
+                <a:cs typeface="Microsoft YaHei"/>
               </a:rPr>
               <a:t>平台完成安全测评并灰度接入财经/供应链 2 个域, 周活跃用户 1200+, 高频流程自动化率 58%, 按期 GA 无阻塞项</a:t>
             </a:r>
@@ -5010,14 +5311,21 @@
               <a:lnSpc>
                 <a:spcPct val="112000"/>
               </a:lnSpc>
+              <a:spcBef>
+                <a:spcPts val="0"/>
+              </a:spcBef>
+              <a:spcAft>
+                <a:spcPts val="0"/>
+              </a:spcAft>
             </a:pPr>
             <a:r>
-              <a:rPr sz="1100" b="0" i="0">
+              <a:rPr sz="1100" b="0" i="0" lang="zh-CN" altLang="zh-CN">
                 <a:solidFill>
                   <a:srgbClr val="595959"/>
                 </a:solidFill>
                 <a:latin typeface="Microsoft YaHei"/>
                 <a:ea typeface="Microsoft YaHei"/>
+                <a:cs typeface="Microsoft YaHei"/>
               </a:rPr>
               <a:t>IT 平台部/赵敏</a:t>
             </a:r>
@@ -5050,14 +5358,21 @@
               <a:lnSpc>
                 <a:spcPct val="112000"/>
               </a:lnSpc>
+              <a:spcBef>
+                <a:spcPts val="0"/>
+              </a:spcBef>
+              <a:spcAft>
+                <a:spcPts val="0"/>
+              </a:spcAft>
             </a:pPr>
             <a:r>
-              <a:rPr sz="1100" b="1" i="0">
+              <a:rPr sz="1100" b="1" i="0" lang="zh-CN" altLang="zh-CN">
                 <a:solidFill>
                   <a:srgbClr val="262626"/>
                 </a:solidFill>
                 <a:latin typeface="Microsoft YaHei"/>
                 <a:ea typeface="Microsoft YaHei"/>
+                <a:cs typeface="Microsoft YaHei"/>
               </a:rPr>
               <a:t>8/1 正式 GA</a:t>
             </a:r>
@@ -5106,7 +5421,14 @@
           <a:bodyPr rtlCol="0" anchor="ctr"/>
           <a:lstStyle/>
           <a:p>
-            <a:pPr algn="ctr"/>
+            <a:pPr algn="ctr">
+              <a:spcBef>
+                <a:spcPts val="0"/>
+              </a:spcBef>
+              <a:spcAft>
+                <a:spcPts val="0"/>
+              </a:spcAft>
+            </a:pPr>
           </a:p>
         </p:txBody>
       </p:sp>
@@ -5152,7 +5474,14 @@
           <a:bodyPr rtlCol="0" anchor="ctr"/>
           <a:lstStyle/>
           <a:p>
-            <a:pPr algn="ctr"/>
+            <a:pPr algn="ctr">
+              <a:spcBef>
+                <a:spcPts val="0"/>
+              </a:spcBef>
+              <a:spcAft>
+                <a:spcPts val="0"/>
+              </a:spcAft>
+            </a:pPr>
           </a:p>
         </p:txBody>
       </p:sp>
@@ -5198,7 +5527,14 @@
           <a:bodyPr rtlCol="0" anchor="ctr"/>
           <a:lstStyle/>
           <a:p>
-            <a:pPr algn="ctr"/>
+            <a:pPr algn="ctr">
+              <a:spcBef>
+                <a:spcPts val="0"/>
+              </a:spcBef>
+              <a:spcAft>
+                <a:spcPts val="0"/>
+              </a:spcAft>
+            </a:pPr>
           </a:p>
         </p:txBody>
       </p:sp>
@@ -5244,7 +5580,14 @@
           <a:bodyPr rtlCol="0" anchor="ctr"/>
           <a:lstStyle/>
           <a:p>
-            <a:pPr algn="ctr"/>
+            <a:pPr algn="ctr">
+              <a:spcBef>
+                <a:spcPts val="0"/>
+              </a:spcBef>
+              <a:spcAft>
+                <a:spcPts val="0"/>
+              </a:spcAft>
+            </a:pPr>
           </a:p>
         </p:txBody>
       </p:sp>
@@ -5272,16 +5615,23 @@
           <a:p>
             <a:pPr algn="l">
               <a:lnSpc>
-                <a:spcPct val="112000"/>
+                <a:spcPct val="96000"/>
               </a:lnSpc>
+              <a:spcBef>
+                <a:spcPts val="0"/>
+              </a:spcBef>
+              <a:spcAft>
+                <a:spcPts val="0"/>
+              </a:spcAft>
             </a:pPr>
             <a:r>
-              <a:rPr sz="1200" b="1" i="0">
+              <a:rPr sz="1120" b="1" i="0" lang="zh-CN" altLang="zh-CN">
                 <a:solidFill>
                   <a:srgbClr val="1F4E79"/>
                 </a:solidFill>
                 <a:latin typeface="Microsoft YaHei"/>
                 <a:ea typeface="Microsoft YaHei"/>
+                <a:cs typeface="Microsoft YaHei"/>
               </a:rPr>
               <a:t>盘古行业模型落地</a:t>
             </a:r>
@@ -5314,14 +5664,21 @@
               <a:lnSpc>
                 <a:spcPct val="112000"/>
               </a:lnSpc>
+              <a:spcBef>
+                <a:spcPts val="0"/>
+              </a:spcBef>
+              <a:spcAft>
+                <a:spcPts val="0"/>
+              </a:spcAft>
             </a:pPr>
             <a:r>
-              <a:rPr sz="1100" b="0" i="0">
+              <a:rPr sz="1100" b="0" i="0" lang="zh-CN" altLang="zh-CN">
                 <a:solidFill>
                   <a:srgbClr val="262626"/>
                 </a:solidFill>
                 <a:latin typeface="Microsoft YaHei"/>
                 <a:ea typeface="Microsoft YaHei"/>
+                <a:cs typeface="Microsoft YaHei"/>
               </a:rPr>
               <a:t>政务/矿山 2 个行业版完成 POC, 关键场景准确率 91% 达商用门槛, 首批 3 家客户进入商务谈判, 预计 8 月签首单</a:t>
             </a:r>
@@ -5354,14 +5711,21 @@
               <a:lnSpc>
                 <a:spcPct val="112000"/>
               </a:lnSpc>
+              <a:spcBef>
+                <a:spcPts val="0"/>
+              </a:spcBef>
+              <a:spcAft>
+                <a:spcPts val="0"/>
+              </a:spcAft>
             </a:pPr>
             <a:r>
-              <a:rPr sz="1100" b="0" i="0">
+              <a:rPr sz="1100" b="0" i="0" lang="zh-CN" altLang="zh-CN">
                 <a:solidFill>
                   <a:srgbClr val="595959"/>
                 </a:solidFill>
                 <a:latin typeface="Microsoft YaHei"/>
                 <a:ea typeface="Microsoft YaHei"/>
+                <a:cs typeface="Microsoft YaHei"/>
               </a:rPr>
               <a:t>云 BU/陈晨</a:t>
             </a:r>
@@ -5394,14 +5758,21 @@
               <a:lnSpc>
                 <a:spcPct val="112000"/>
               </a:lnSpc>
+              <a:spcBef>
+                <a:spcPts val="0"/>
+              </a:spcBef>
+              <a:spcAft>
+                <a:spcPts val="0"/>
+              </a:spcAft>
             </a:pPr>
             <a:r>
-              <a:rPr sz="1100" b="1" i="0">
+              <a:rPr sz="1100" b="1" i="0" lang="zh-CN" altLang="zh-CN">
                 <a:solidFill>
                   <a:srgbClr val="262626"/>
                 </a:solidFill>
                 <a:latin typeface="Microsoft YaHei"/>
                 <a:ea typeface="Microsoft YaHei"/>
+                <a:cs typeface="Microsoft YaHei"/>
               </a:rPr>
               <a:t>8/15 商用签约</a:t>
             </a:r>
@@ -5448,7 +5819,14 @@
           <a:bodyPr rtlCol="0" anchor="ctr"/>
           <a:lstStyle/>
           <a:p>
-            <a:pPr algn="ctr"/>
+            <a:pPr algn="ctr">
+              <a:spcBef>
+                <a:spcPts val="0"/>
+              </a:spcBef>
+              <a:spcAft>
+                <a:spcPts val="0"/>
+              </a:spcAft>
+            </a:pPr>
           </a:p>
         </p:txBody>
       </p:sp>
@@ -5494,7 +5872,14 @@
           <a:bodyPr rtlCol="0" anchor="ctr"/>
           <a:lstStyle/>
           <a:p>
-            <a:pPr algn="ctr"/>
+            <a:pPr algn="ctr">
+              <a:spcBef>
+                <a:spcPts val="0"/>
+              </a:spcBef>
+              <a:spcAft>
+                <a:spcPts val="0"/>
+              </a:spcAft>
+            </a:pPr>
           </a:p>
         </p:txBody>
       </p:sp>
@@ -5538,7 +5923,14 @@
           <a:bodyPr rtlCol="0" anchor="ctr"/>
           <a:lstStyle/>
           <a:p>
-            <a:pPr algn="ctr"/>
+            <a:pPr algn="ctr">
+              <a:spcBef>
+                <a:spcPts val="0"/>
+              </a:spcBef>
+              <a:spcAft>
+                <a:spcPts val="0"/>
+              </a:spcAft>
+            </a:pPr>
           </a:p>
         </p:txBody>
       </p:sp>
@@ -5550,8 +5942,8 @@
         </p:nvSpPr>
         <p:spPr>
           <a:xfrm>
-            <a:off x="635000" y="5283200"/>
-            <a:ext cx="1905000" cy="215900"/>
+            <a:off x="635000" y="5261356"/>
+            <a:ext cx="1905000" cy="259588"/>
           </a:xfrm>
           <a:prstGeom prst="rect">
             <a:avLst/>
@@ -5568,14 +5960,21 @@
               <a:lnSpc>
                 <a:spcPct val="112000"/>
               </a:lnSpc>
+              <a:spcBef>
+                <a:spcPts val="0"/>
+              </a:spcBef>
+              <a:spcAft>
+                <a:spcPts val="0"/>
+              </a:spcAft>
             </a:pPr>
             <a:r>
-              <a:rPr sz="1500" b="1" i="0">
+              <a:rPr sz="1500" b="1" i="0" lang="zh-CN" altLang="zh-CN">
                 <a:solidFill>
                   <a:srgbClr val="B90A0A"/>
                 </a:solidFill>
                 <a:latin typeface="Microsoft YaHei"/>
                 <a:ea typeface="Microsoft YaHei"/>
+                <a:cs typeface="Microsoft YaHei"/>
               </a:rPr>
               <a:t>总体判断</a:t>
             </a:r>
@@ -5606,16 +6005,23 @@
           <a:p>
             <a:pPr algn="l">
               <a:lnSpc>
-                <a:spcPct val="112000"/>
+                <a:spcPct val="104000"/>
               </a:lnSpc>
+              <a:spcBef>
+                <a:spcPts val="0"/>
+              </a:spcBef>
+              <a:spcAft>
+                <a:spcPts val="0"/>
+              </a:spcAft>
             </a:pPr>
             <a:r>
-              <a:rPr sz="1300" b="0" i="0">
+              <a:rPr sz="1220" b="0" i="0" lang="zh-CN" altLang="zh-CN">
                 <a:solidFill>
                   <a:srgbClr val="262626"/>
                 </a:solidFill>
                 <a:latin typeface="Microsoft YaHei"/>
                 <a:ea typeface="Microsoft YaHei"/>
+                <a:cs typeface="Microsoft YaHei"/>
               </a:rPr>
               <a:t>五大议题中四项按期或超预期推进; 跨境数据合规为当前唯一红色风险, 已升级至部门例会跟踪, 要求 7/5 前完成人力补齐与出境清单闭环, 否则将影响 7 月外部审计结论; 盘古行业版商务谈判需销售侧同步推进, 其余议题维持周例会节奏跟踪即可。</a:t>
             </a:r>
@@ -5662,7 +6068,14 @@
           <a:bodyPr rtlCol="0" anchor="ctr"/>
           <a:lstStyle/>
           <a:p>
-            <a:pPr algn="ctr"/>
+            <a:pPr algn="ctr">
+              <a:spcBef>
+                <a:spcPts val="0"/>
+              </a:spcBef>
+              <a:spcAft>
+                <a:spcPts val="0"/>
+              </a:spcAft>
+            </a:pPr>
           </a:p>
         </p:txBody>
       </p:sp>
@@ -5692,14 +6105,21 @@
               <a:lnSpc>
                 <a:spcPct val="112000"/>
               </a:lnSpc>
+              <a:spcBef>
+                <a:spcPts val="0"/>
+              </a:spcBef>
+              <a:spcAft>
+                <a:spcPts val="0"/>
+              </a:spcAft>
             </a:pPr>
             <a:r>
-              <a:rPr sz="1500" b="1" i="0">
+              <a:rPr sz="1500" b="1" i="0" lang="zh-CN" altLang="zh-CN">
                 <a:solidFill>
                   <a:srgbClr val="262626"/>
                 </a:solidFill>
                 <a:latin typeface="Microsoft YaHei"/>
                 <a:ea typeface="Microsoft YaHei"/>
+                <a:cs typeface="Microsoft YaHei"/>
               </a:rPr>
               <a:t>按期率 4/5 · 风险 1 项</a:t>
             </a:r>
